--- a/docs/SSH_WEB_FIREWALL_Academic_Presentation.pptx
+++ b/docs/SSH_WEB_FIREWALL_Academic_Presentation.pptx
@@ -3165,7 +3165,7 @@
                   <a:srgbClr val="475569"/>
                 </a:solidFill>
               </a:rPr>
-              <a:t>Multi-source Isolation Forest modeling with live Docker ELK monitoring</a:t>
+              <a:t>Windows PowerShell workflow with live Docker ELK monitoring</a:t>
             </a:r>
           </a:p>
         </p:txBody>
@@ -5047,7 +5047,7 @@
               </a:defRPr>
             </a:pPr>
             <a:r>
-              <a:t>Run evaluation/evaluate_all_models.py to regenerate metrics and figures.</a:t>
+              <a:t>Run .\evaluation\evaluate_all_models.py to regenerate metrics and figures.</a:t>
             </a:r>
           </a:p>
           <a:p>
@@ -5062,7 +5062,7 @@
               </a:defRPr>
             </a:pPr>
             <a:r>
-              <a:t>Start ELK with elk/start_elk.sh and install dashboards with elk/setup_kibana.sh.</a:t>
+              <a:t>Start ELK with .\elk\start_elk.ps1 and install dashboards with .\elk\setup_kibana.ps1.</a:t>
             </a:r>
           </a:p>
           <a:p>
@@ -5077,7 +5077,7 @@
               </a:defRPr>
             </a:pPr>
             <a:r>
-              <a:t>Run live/listen_and_score.py and live/generate_logs.py in separate terminals.</a:t>
+              <a:t>Run .\live\listen_and_score.py and .\live\generate_logs.py in separate PowerShell terminals.</a:t>
             </a:r>
           </a:p>
         </p:txBody>
